--- a/AIFinanceCrashcourse/slides/Module-02-Prompt-Engineering-and-RAG.pptx
+++ b/AIFinanceCrashcourse/slides/Module-02-Prompt-Engineering-and-RAG.pptx
@@ -3278,7 +3278,7 @@
                   <a:srgbClr val="C9A227"/>
                 </a:solidFill>
               </a:rPr>
-              <a:t>ISBMS · PGDM 2025–27 · SEMESTER III · SESSION 2 OF 10</a:t>
+              <a:t>AI IN FINANCE · THE COMPLETE CRASH COURSE · MODULE 2 OF 10</a:t>
             </a:r>
           </a:p>
         </p:txBody>
@@ -3437,7 +3437,7 @@
                   <a:srgbClr val="8FA1C4"/>
                 </a:solidFill>
               </a:rPr>
-              <a:t>Faculty · Agentic AI &amp; Advanced Analytics in Finance (PGDM-SEM3-SPEC-AIFINANCE)</a:t>
+              <a:t>AI in Finance: The Complete Crash Course</a:t>
             </a:r>
           </a:p>
           <a:p>
@@ -3455,7 +3455,7 @@
                   <a:srgbClr val="C9A227"/>
                 </a:solidFill>
               </a:rPr>
-              <a:t>tejasgjadhav.github.io/AIFINANCE</a:t>
+              <a:t>tejasgjadhav.github.io/AIFinanceCrashcourse</a:t>
             </a:r>
           </a:p>
         </p:txBody>
@@ -3747,7 +3747,7 @@
                   <a:srgbClr val="8FA1C4"/>
                 </a:solidFill>
               </a:rPr>
-              <a:t>ISBMS · PGDM 2025–27 · AGENTIC AI &amp; ADVANCED ANALYTICS IN FINANCE</a:t>
+              <a:t>AI IN FINANCE · THE COMPLETE CRASH COURSE</a:t>
             </a:r>
           </a:p>
         </p:txBody>
@@ -4559,7 +4559,7 @@
                   <a:srgbClr val="C9A227"/>
                 </a:solidFill>
               </a:rPr>
-              <a:t>▪  </a:t>
+              <a:t>▪</a:t>
             </a:r>
             <a:r>
               <a:rPr sz="1050" b="0" i="0">
@@ -4585,7 +4585,7 @@
                   <a:srgbClr val="C9A227"/>
                 </a:solidFill>
               </a:rPr>
-              <a:t>▪  </a:t>
+              <a:t>▪</a:t>
             </a:r>
             <a:r>
               <a:rPr sz="1050" b="0" i="0">
@@ -4611,7 +4611,7 @@
                   <a:srgbClr val="C9A227"/>
                 </a:solidFill>
               </a:rPr>
-              <a:t>▪  </a:t>
+              <a:t>▪</a:t>
             </a:r>
             <a:r>
               <a:rPr sz="1050" b="0" i="0">
@@ -4949,7 +4949,7 @@
                   <a:srgbClr val="C9A227"/>
                 </a:solidFill>
               </a:rPr>
-              <a:t>What you have at the end:  </a:t>
+              <a:t>What you have at the end:</a:t>
             </a:r>
             <a:r>
               <a:rPr sz="1200" b="0" i="0">
@@ -4995,7 +4995,7 @@
                   <a:srgbClr val="5D6B7E"/>
                 </a:solidFill>
               </a:rPr>
-              <a:t>ISBMS · PGDM 2025–27 · AGENTIC AI &amp; ADVANCED ANALYTICS IN FINANCE</a:t>
+              <a:t>AI IN FINANCE · THE COMPLETE CRASH COURSE</a:t>
             </a:r>
           </a:p>
         </p:txBody>
@@ -5375,7 +5375,7 @@
                 </a:solidFill>
                 <a:latin typeface="Calibri"/>
               </a:rPr>
-              <a:t>TIP  </a:t>
+              <a:t>TIP</a:t>
             </a:r>
             <a:r>
               <a:rPr sz="900" b="0" i="0">
@@ -5571,7 +5571,7 @@
                 </a:solidFill>
                 <a:latin typeface="Calibri"/>
               </a:rPr>
-              <a:t>TIP  </a:t>
+              <a:t>TIP</a:t>
             </a:r>
             <a:r>
               <a:rPr sz="900" b="0" i="0">
@@ -5767,7 +5767,7 @@
                 </a:solidFill>
                 <a:latin typeface="Calibri"/>
               </a:rPr>
-              <a:t>TIP  </a:t>
+              <a:t>TIP</a:t>
             </a:r>
             <a:r>
               <a:rPr sz="900" b="0" i="0">
@@ -5963,7 +5963,7 @@
                 </a:solidFill>
                 <a:latin typeface="Calibri"/>
               </a:rPr>
-              <a:t>TIP  </a:t>
+              <a:t>TIP</a:t>
             </a:r>
             <a:r>
               <a:rPr sz="900" b="0" i="0">
@@ -6159,7 +6159,7 @@
                 </a:solidFill>
                 <a:latin typeface="Calibri"/>
               </a:rPr>
-              <a:t>TIP  </a:t>
+              <a:t>TIP</a:t>
             </a:r>
             <a:r>
               <a:rPr sz="900" b="0" i="0">
@@ -6355,7 +6355,7 @@
                 </a:solidFill>
                 <a:latin typeface="Calibri"/>
               </a:rPr>
-              <a:t>TIP  </a:t>
+              <a:t>TIP</a:t>
             </a:r>
             <a:r>
               <a:rPr sz="900" b="0" i="0">
@@ -6736,7 +6736,7 @@
                 </a:solidFill>
                 <a:latin typeface="Calibri"/>
               </a:rPr>
-              <a:t>TIP  </a:t>
+              <a:t>TIP</a:t>
             </a:r>
             <a:r>
               <a:rPr sz="900" b="0" i="0">
@@ -6932,7 +6932,7 @@
                 </a:solidFill>
                 <a:latin typeface="Calibri"/>
               </a:rPr>
-              <a:t>TIP  </a:t>
+              <a:t>TIP</a:t>
             </a:r>
             <a:r>
               <a:rPr sz="900" b="0" i="0">
@@ -7128,7 +7128,7 @@
                 </a:solidFill>
                 <a:latin typeface="Calibri"/>
               </a:rPr>
-              <a:t>TIP  </a:t>
+              <a:t>TIP</a:t>
             </a:r>
             <a:r>
               <a:rPr sz="900" b="0" i="0">
@@ -7324,7 +7324,7 @@
                 </a:solidFill>
                 <a:latin typeface="Calibri"/>
               </a:rPr>
-              <a:t>TIP  </a:t>
+              <a:t>TIP</a:t>
             </a:r>
             <a:r>
               <a:rPr sz="900" b="0" i="0">
@@ -7751,7 +7751,7 @@
                 </a:solidFill>
                 <a:latin typeface="Calibri"/>
               </a:rPr>
-              <a:t>TIP  </a:t>
+              <a:t>TIP</a:t>
             </a:r>
             <a:r>
               <a:rPr sz="1050" b="0" i="0">
@@ -7947,7 +7947,7 @@
                 </a:solidFill>
                 <a:latin typeface="Calibri"/>
               </a:rPr>
-              <a:t>TIP  </a:t>
+              <a:t>TIP</a:t>
             </a:r>
             <a:r>
               <a:rPr sz="1050" b="0" i="0">
@@ -8143,7 +8143,7 @@
                 </a:solidFill>
                 <a:latin typeface="Calibri"/>
               </a:rPr>
-              <a:t>TIP  </a:t>
+              <a:t>TIP</a:t>
             </a:r>
             <a:r>
               <a:rPr sz="1050" b="0" i="0">
@@ -8235,7 +8235,7 @@
                   <a:srgbClr val="0F2145"/>
                 </a:solidFill>
               </a:rPr>
-              <a:t>Before Session 3:  </a:t>
+              <a:t>Before Session 3:</a:t>
             </a:r>
             <a:r>
               <a:rPr sz="1100" b="0" i="0">
@@ -8281,7 +8281,7 @@
                   <a:srgbClr val="5D6B7E"/>
                 </a:solidFill>
               </a:rPr>
-              <a:t>ISBMS · PGDM 2025–27 · AGENTIC AI &amp; ADVANCED ANALYTICS IN FINANCE</a:t>
+              <a:t>AI IN FINANCE · THE COMPLETE CRASH COURSE</a:t>
             </a:r>
           </a:p>
         </p:txBody>
@@ -8656,7 +8656,7 @@
                   <a:srgbClr val="C9A227"/>
                 </a:solidFill>
               </a:rPr>
-              <a:t>▪  </a:t>
+              <a:t>▪</a:t>
             </a:r>
             <a:r>
               <a:rPr sz="1100" b="0" i="0">
@@ -8702,7 +8702,7 @@
                   <a:srgbClr val="C9A227"/>
                 </a:solidFill>
               </a:rPr>
-              <a:t>▪  </a:t>
+              <a:t>▪</a:t>
             </a:r>
             <a:r>
               <a:rPr sz="1100" b="0" i="0">
@@ -8748,7 +8748,7 @@
                   <a:srgbClr val="C9A227"/>
                 </a:solidFill>
               </a:rPr>
-              <a:t>▪  </a:t>
+              <a:t>▪</a:t>
             </a:r>
             <a:r>
               <a:rPr sz="1100" b="0" i="0">
@@ -8794,7 +8794,7 @@
                   <a:srgbClr val="C9A227"/>
                 </a:solidFill>
               </a:rPr>
-              <a:t>▪  </a:t>
+              <a:t>▪</a:t>
             </a:r>
             <a:r>
               <a:rPr sz="1100" b="0" i="0">
@@ -8840,7 +8840,7 @@
                   <a:srgbClr val="C9A227"/>
                 </a:solidFill>
               </a:rPr>
-              <a:t>▪  </a:t>
+              <a:t>▪</a:t>
             </a:r>
             <a:r>
               <a:rPr sz="1100" b="0" i="0">
@@ -9030,7 +9030,7 @@
                   <a:srgbClr val="C9A227"/>
                 </a:solidFill>
               </a:rPr>
-              <a:t>▪  </a:t>
+              <a:t>▪</a:t>
             </a:r>
             <a:r>
               <a:rPr sz="1100" b="0" i="0">
@@ -9076,7 +9076,7 @@
                   <a:srgbClr val="C9A227"/>
                 </a:solidFill>
               </a:rPr>
-              <a:t>▪  </a:t>
+              <a:t>▪</a:t>
             </a:r>
             <a:r>
               <a:rPr sz="1100" b="0" i="0">
@@ -9122,7 +9122,7 @@
                   <a:srgbClr val="C9A227"/>
                 </a:solidFill>
               </a:rPr>
-              <a:t>▪  </a:t>
+              <a:t>▪</a:t>
             </a:r>
             <a:r>
               <a:rPr sz="1100" b="0" i="0">
@@ -9168,7 +9168,7 @@
                   <a:srgbClr val="C9A227"/>
                 </a:solidFill>
               </a:rPr>
-              <a:t>▪  </a:t>
+              <a:t>▪</a:t>
             </a:r>
             <a:r>
               <a:rPr sz="1100" b="0" i="0">
@@ -9214,7 +9214,7 @@
                   <a:srgbClr val="C9A227"/>
                 </a:solidFill>
               </a:rPr>
-              <a:t>▪  </a:t>
+              <a:t>▪</a:t>
             </a:r>
             <a:r>
               <a:rPr sz="1100" b="0" i="0">
@@ -9404,7 +9404,7 @@
                   <a:srgbClr val="C9A227"/>
                 </a:solidFill>
               </a:rPr>
-              <a:t>▪  </a:t>
+              <a:t>▪</a:t>
             </a:r>
             <a:r>
               <a:rPr sz="1100" b="0" i="0">
@@ -9450,7 +9450,7 @@
                   <a:srgbClr val="C9A227"/>
                 </a:solidFill>
               </a:rPr>
-              <a:t>▪  </a:t>
+              <a:t>▪</a:t>
             </a:r>
             <a:r>
               <a:rPr sz="1100" b="0" i="0">
@@ -9496,7 +9496,7 @@
                   <a:srgbClr val="C9A227"/>
                 </a:solidFill>
               </a:rPr>
-              <a:t>▪  </a:t>
+              <a:t>▪</a:t>
             </a:r>
             <a:r>
               <a:rPr sz="1100" b="0" i="0" dirty="0">
@@ -9542,7 +9542,7 @@
                   <a:srgbClr val="C9A227"/>
                 </a:solidFill>
               </a:rPr>
-              <a:t>▪  </a:t>
+              <a:t>▪</a:t>
             </a:r>
             <a:r>
               <a:rPr sz="1100" b="0" i="0">
@@ -9588,7 +9588,7 @@
                   <a:srgbClr val="C9A227"/>
                 </a:solidFill>
               </a:rPr>
-              <a:t>▪  </a:t>
+              <a:t>▪</a:t>
             </a:r>
             <a:r>
               <a:rPr sz="1100" b="0" i="0">
@@ -9724,7 +9724,7 @@
                   <a:srgbClr val="C9A227"/>
                 </a:solidFill>
               </a:rPr>
-              <a:t>Our goal for today:  </a:t>
+              <a:t>Our goal for today:</a:t>
             </a:r>
             <a:r>
               <a:rPr sz="1200" b="0" i="0">
@@ -9770,7 +9770,7 @@
                   <a:srgbClr val="5D6B7E"/>
                 </a:solidFill>
               </a:rPr>
-              <a:t>ISBMS · PGDM 2025–27 · AGENTIC AI &amp; ADVANCED ANALYTICS IN FINANCE</a:t>
+              <a:t>AI IN FINANCE · THE COMPLETE CRASH COURSE</a:t>
             </a:r>
           </a:p>
         </p:txBody>
@@ -10988,7 +10988,7 @@
                   <a:srgbClr val="C9A227"/>
                 </a:solidFill>
               </a:rPr>
-              <a:t>The order of use:  </a:t>
+              <a:t>The order of use:</a:t>
             </a:r>
             <a:r>
               <a:rPr sz="1200" b="0" i="0">
@@ -11034,7 +11034,7 @@
                   <a:srgbClr val="5D6B7E"/>
                 </a:solidFill>
               </a:rPr>
-              <a:t>ISBMS · PGDM 2025–27 · AGENTIC AI &amp; ADVANCED ANALYTICS IN FINANCE</a:t>
+              <a:t>AI IN FINANCE · THE COMPLETE CRASH COURSE</a:t>
             </a:r>
           </a:p>
         </p:txBody>
@@ -11953,7 +11953,7 @@
                   <a:srgbClr val="C9A227"/>
                 </a:solidFill>
               </a:rPr>
-              <a:t>The skeleton:  </a:t>
+              <a:t>The skeleton:</a:t>
             </a:r>
             <a:r>
               <a:rPr sz="1200" b="0" i="0">
@@ -11999,7 +11999,7 @@
                   <a:srgbClr val="5D6B7E"/>
                 </a:solidFill>
               </a:rPr>
-              <a:t>ISBMS · PGDM 2025–27 · AGENTIC AI &amp; ADVANCED ANALYTICS IN FINANCE</a:t>
+              <a:t>AI IN FINANCE · THE COMPLETE CRASH COURSE</a:t>
             </a:r>
           </a:p>
         </p:txBody>
@@ -12619,7 +12619,7 @@
                   <a:srgbClr val="0F2145"/>
                 </a:solidFill>
               </a:rPr>
-              <a:t>Ground it.  </a:t>
+              <a:t>Ground it.</a:t>
             </a:r>
             <a:r>
               <a:rPr sz="1050" b="0" i="0">
@@ -12755,7 +12755,7 @@
                   <a:srgbClr val="0F2145"/>
                 </a:solidFill>
               </a:rPr>
-              <a:t>Allow “not found”.  </a:t>
+              <a:t>Allow “not found”.</a:t>
             </a:r>
             <a:r>
               <a:rPr sz="1050" b="0" i="0">
@@ -12891,7 +12891,7 @@
                   <a:srgbClr val="0F2145"/>
                 </a:solidFill>
               </a:rPr>
-              <a:t>Demand citations.  </a:t>
+              <a:t>Demand citations.</a:t>
             </a:r>
             <a:r>
               <a:rPr sz="1050" b="0" i="0">
@@ -13027,7 +13027,7 @@
                   <a:srgbClr val="0F2145"/>
                 </a:solidFill>
               </a:rPr>
-              <a:t>Verify the numbers.  </a:t>
+              <a:t>Verify the numbers.</a:t>
             </a:r>
             <a:r>
               <a:rPr sz="1050" b="0" i="0">
@@ -13163,7 +13163,7 @@
                   <a:srgbClr val="C9A227"/>
                 </a:solidFill>
               </a:rPr>
-              <a:t>The desk rule:  </a:t>
+              <a:t>The desk rule:</a:t>
             </a:r>
             <a:r>
               <a:rPr sz="1200" b="0" i="0" dirty="0">
@@ -13209,7 +13209,7 @@
                   <a:srgbClr val="5D6B7E"/>
                 </a:solidFill>
               </a:rPr>
-              <a:t>ISBMS · PGDM 2025–27 · AGENTIC AI &amp; ADVANCED ANALYTICS IN FINANCE</a:t>
+              <a:t>AI IN FINANCE · THE COMPLETE CRASH COURSE</a:t>
             </a:r>
           </a:p>
         </p:txBody>
@@ -13530,7 +13530,7 @@
                   <a:srgbClr val="3A5C9E"/>
                 </a:solidFill>
               </a:rPr>
-              <a:t>WHAT IT IS   </a:t>
+              <a:t>WHAT IT IS</a:t>
             </a:r>
             <a:r>
               <a:rPr sz="1100" b="0" i="0">
@@ -14338,7 +14338,7 @@
                   <a:srgbClr val="C9A227"/>
                 </a:solidFill>
               </a:rPr>
-              <a:t>How RAG grounds it:  </a:t>
+              <a:t>How RAG grounds it:</a:t>
             </a:r>
             <a:r>
               <a:rPr sz="1200" b="0" i="0">
@@ -14384,7 +14384,7 @@
                   <a:srgbClr val="5D6B7E"/>
                 </a:solidFill>
               </a:rPr>
-              <a:t>ISBMS · PGDM 2025–27 · AGENTIC AI &amp; ADVANCED ANALYTICS IN FINANCE</a:t>
+              <a:t>AI IN FINANCE · THE COMPLETE CRASH COURSE</a:t>
             </a:r>
           </a:p>
         </p:txBody>
@@ -14695,7 +14695,7 @@
                   <a:srgbClr val="3A5C9E"/>
                 </a:solidFill>
               </a:rPr>
-              <a:t>THE FULL FORM   </a:t>
+              <a:t>THE FULL FORM</a:t>
             </a:r>
             <a:r>
               <a:rPr sz="1100" b="0">
@@ -15309,7 +15309,7 @@
                   <a:srgbClr val="3A5C9E"/>
                 </a:solidFill>
               </a:rPr>
-              <a:t>THE CLASSROOM ANALOGY   </a:t>
+              <a:t>THE CLASSROOM ANALOGY</a:t>
             </a:r>
             <a:r>
               <a:rPr sz="1100" b="0">
@@ -15443,7 +15443,7 @@
                   <a:srgbClr val="C9A227"/>
                 </a:solidFill>
               </a:rPr>
-              <a:t>Say it as one sentence:  </a:t>
+              <a:t>Say it as one sentence:</a:t>
             </a:r>
             <a:r>
               <a:rPr sz="1200" b="0">
@@ -15489,7 +15489,7 @@
                   <a:srgbClr val="5D6B7E"/>
                 </a:solidFill>
               </a:rPr>
-              <a:t>ISBMS · PGDM 2025–27 · AGENTIC AI &amp; ADVANCED ANALYTICS IN FINANCE</a:t>
+              <a:t>AI IN FINANCE · THE COMPLETE CRASH COURSE</a:t>
             </a:r>
           </a:p>
         </p:txBody>
@@ -15810,7 +15810,7 @@
                   <a:srgbClr val="3A5C9E"/>
                 </a:solidFill>
               </a:rPr>
-              <a:t>THE PROBLEM   </a:t>
+              <a:t>THE PROBLEM</a:t>
             </a:r>
             <a:r>
               <a:rPr sz="1100" b="0" i="0">
@@ -16942,7 +16942,7 @@
                   <a:srgbClr val="C9A227"/>
                 </a:solidFill>
               </a:rPr>
-              <a:t>Retrieval-Augmented Generation:  </a:t>
+              <a:t>Retrieval-Augmented Generation:</a:t>
             </a:r>
             <a:r>
               <a:rPr sz="1200" b="0" i="0">
@@ -16988,7 +16988,7 @@
                   <a:srgbClr val="5D6B7E"/>
                 </a:solidFill>
               </a:rPr>
-              <a:t>ISBMS · PGDM 2025–27 · AGENTIC AI &amp; ADVANCED ANALYTICS IN FINANCE</a:t>
+              <a:t>AI IN FINANCE · THE COMPLETE CRASH COURSE</a:t>
             </a:r>
           </a:p>
         </p:txBody>
@@ -18129,7 +18129,7 @@
                   <a:srgbClr val="C9A227"/>
                 </a:solidFill>
               </a:rPr>
-              <a:t>When the bot is wrong:  </a:t>
+              <a:t>When the bot is wrong:</a:t>
             </a:r>
             <a:r>
               <a:rPr sz="1200" b="0" i="0">
@@ -18175,7 +18175,7 @@
                   <a:srgbClr val="5D6B7E"/>
                 </a:solidFill>
               </a:rPr>
-              <a:t>ISBMS · PGDM 2025–27 · AGENTIC AI &amp; ADVANCED ANALYTICS IN FINANCE</a:t>
+              <a:t>AI IN FINANCE · THE COMPLETE CRASH COURSE</a:t>
             </a:r>
           </a:p>
         </p:txBody>
